--- a/lectures/lecture_2/lecture_2.pptx
+++ b/lectures/lecture_2/lecture_2.pptx
@@ -5,36 +5,36 @@
     <p:sldMasterId id="2147483648" r:id="rId1"/>
   </p:sldMasterIdLst>
   <p:sldIdLst>
-    <p:sldId id="256" r:id="rId6"/>
-    <p:sldId id="257" r:id="rId7"/>
-    <p:sldId id="258" r:id="rId8"/>
-    <p:sldId id="259" r:id="rId9"/>
-    <p:sldId id="260" r:id="rId10"/>
-    <p:sldId id="261" r:id="rId11"/>
-    <p:sldId id="262" r:id="rId12"/>
-    <p:sldId id="263" r:id="rId13"/>
-    <p:sldId id="264" r:id="rId14"/>
-    <p:sldId id="265" r:id="rId15"/>
-    <p:sldId id="266" r:id="rId16"/>
-    <p:sldId id="267" r:id="rId17"/>
-    <p:sldId id="268" r:id="rId18"/>
-    <p:sldId id="269" r:id="rId19"/>
-    <p:sldId id="270" r:id="rId20"/>
-    <p:sldId id="271" r:id="rId21"/>
-    <p:sldId id="272" r:id="rId22"/>
-    <p:sldId id="273" r:id="rId23"/>
-    <p:sldId id="274" r:id="rId24"/>
-    <p:sldId id="275" r:id="rId25"/>
-    <p:sldId id="276" r:id="rId26"/>
-    <p:sldId id="277" r:id="rId27"/>
-    <p:sldId id="278" r:id="rId28"/>
-    <p:sldId id="279" r:id="rId5"/>
-    <p:sldId id="280" r:id="rId4"/>
-    <p:sldId id="281" r:id="rId3"/>
-    <p:sldId id="282" r:id="rId2"/>
-    <p:sldId id="283" r:id="rId33"/>
-    <p:sldId id="284" r:id="rId34"/>
-    <p:sldId id="285" r:id="rId35"/>
+    <p:sldId id="256" r:id="rId2"/>
+    <p:sldId id="257" r:id="rId3"/>
+    <p:sldId id="258" r:id="rId4"/>
+    <p:sldId id="259" r:id="rId5"/>
+    <p:sldId id="260" r:id="rId6"/>
+    <p:sldId id="261" r:id="rId7"/>
+    <p:sldId id="262" r:id="rId8"/>
+    <p:sldId id="263" r:id="rId9"/>
+    <p:sldId id="264" r:id="rId10"/>
+    <p:sldId id="265" r:id="rId11"/>
+    <p:sldId id="266" r:id="rId12"/>
+    <p:sldId id="267" r:id="rId13"/>
+    <p:sldId id="268" r:id="rId14"/>
+    <p:sldId id="269" r:id="rId15"/>
+    <p:sldId id="270" r:id="rId16"/>
+    <p:sldId id="271" r:id="rId17"/>
+    <p:sldId id="272" r:id="rId18"/>
+    <p:sldId id="273" r:id="rId19"/>
+    <p:sldId id="274" r:id="rId20"/>
+    <p:sldId id="275" r:id="rId21"/>
+    <p:sldId id="276" r:id="rId22"/>
+    <p:sldId id="277" r:id="rId23"/>
+    <p:sldId id="278" r:id="rId24"/>
+    <p:sldId id="279" r:id="rId25"/>
+    <p:sldId id="280" r:id="rId26"/>
+    <p:sldId id="281" r:id="rId27"/>
+    <p:sldId id="282" r:id="rId28"/>
+    <p:sldId id="283" r:id="rId29"/>
+    <p:sldId id="284" r:id="rId30"/>
+    <p:sldId id="285" r:id="rId31"/>
   </p:sldIdLst>
   <p:sldSz cx="12192000" cy="6858000"/>
   <p:notesSz cx="6858000" cy="9144000"/>
@@ -133,6 +133,11 @@
       </a:defRPr>
     </a:lvl9pPr>
   </p:defaultTextStyle>
+  <p:extLst>
+    <p:ext uri="{EFAFB233-063F-42B5-8137-9DF3F51BA10A}">
+      <p15:sldGuideLst xmlns:p15="http://schemas.microsoft.com/office/powerpoint/2012/main"/>
+    </p:ext>
+  </p:extLst>
 </p:presentation>
 </file>
 
@@ -283,7 +288,7 @@
           <a:p>
             <a:fld id="{4F38F130-CAD1-9A4B-87AA-771C4BD74B94}" type="datetimeFigureOut">
               <a:rPr lang="ru-RU" smtClean="0"/>
-              <a:t>27.02.2026</a:t>
+              <a:t>13.03.2026</a:t>
             </a:fld>
             <a:endParaRPr lang="ru-RU"/>
           </a:p>
@@ -481,7 +486,7 @@
           <a:p>
             <a:fld id="{4F38F130-CAD1-9A4B-87AA-771C4BD74B94}" type="datetimeFigureOut">
               <a:rPr lang="ru-RU" smtClean="0"/>
-              <a:t>27.02.2026</a:t>
+              <a:t>13.03.2026</a:t>
             </a:fld>
             <a:endParaRPr lang="ru-RU"/>
           </a:p>
@@ -689,7 +694,7 @@
           <a:p>
             <a:fld id="{4F38F130-CAD1-9A4B-87AA-771C4BD74B94}" type="datetimeFigureOut">
               <a:rPr lang="ru-RU" smtClean="0"/>
-              <a:t>27.02.2026</a:t>
+              <a:t>13.03.2026</a:t>
             </a:fld>
             <a:endParaRPr lang="ru-RU"/>
           </a:p>
@@ -887,7 +892,7 @@
           <a:p>
             <a:fld id="{4F38F130-CAD1-9A4B-87AA-771C4BD74B94}" type="datetimeFigureOut">
               <a:rPr lang="ru-RU" smtClean="0"/>
-              <a:t>27.02.2026</a:t>
+              <a:t>13.03.2026</a:t>
             </a:fld>
             <a:endParaRPr lang="ru-RU"/>
           </a:p>
@@ -1162,7 +1167,7 @@
           <a:p>
             <a:fld id="{4F38F130-CAD1-9A4B-87AA-771C4BD74B94}" type="datetimeFigureOut">
               <a:rPr lang="ru-RU" smtClean="0"/>
-              <a:t>27.02.2026</a:t>
+              <a:t>13.03.2026</a:t>
             </a:fld>
             <a:endParaRPr lang="ru-RU"/>
           </a:p>
@@ -1427,7 +1432,7 @@
           <a:p>
             <a:fld id="{4F38F130-CAD1-9A4B-87AA-771C4BD74B94}" type="datetimeFigureOut">
               <a:rPr lang="ru-RU" smtClean="0"/>
-              <a:t>27.02.2026</a:t>
+              <a:t>13.03.2026</a:t>
             </a:fld>
             <a:endParaRPr lang="ru-RU"/>
           </a:p>
@@ -1839,7 +1844,7 @@
           <a:p>
             <a:fld id="{4F38F130-CAD1-9A4B-87AA-771C4BD74B94}" type="datetimeFigureOut">
               <a:rPr lang="ru-RU" smtClean="0"/>
-              <a:t>27.02.2026</a:t>
+              <a:t>13.03.2026</a:t>
             </a:fld>
             <a:endParaRPr lang="ru-RU"/>
           </a:p>
@@ -1980,7 +1985,7 @@
           <a:p>
             <a:fld id="{4F38F130-CAD1-9A4B-87AA-771C4BD74B94}" type="datetimeFigureOut">
               <a:rPr lang="ru-RU" smtClean="0"/>
-              <a:t>27.02.2026</a:t>
+              <a:t>13.03.2026</a:t>
             </a:fld>
             <a:endParaRPr lang="ru-RU"/>
           </a:p>
@@ -2093,7 +2098,7 @@
           <a:p>
             <a:fld id="{4F38F130-CAD1-9A4B-87AA-771C4BD74B94}" type="datetimeFigureOut">
               <a:rPr lang="ru-RU" smtClean="0"/>
-              <a:t>27.02.2026</a:t>
+              <a:t>13.03.2026</a:t>
             </a:fld>
             <a:endParaRPr lang="ru-RU"/>
           </a:p>
@@ -2404,7 +2409,7 @@
           <a:p>
             <a:fld id="{4F38F130-CAD1-9A4B-87AA-771C4BD74B94}" type="datetimeFigureOut">
               <a:rPr lang="ru-RU" smtClean="0"/>
-              <a:t>27.02.2026</a:t>
+              <a:t>13.03.2026</a:t>
             </a:fld>
             <a:endParaRPr lang="ru-RU"/>
           </a:p>
@@ -2692,7 +2697,7 @@
           <a:p>
             <a:fld id="{4F38F130-CAD1-9A4B-87AA-771C4BD74B94}" type="datetimeFigureOut">
               <a:rPr lang="ru-RU" smtClean="0"/>
-              <a:t>27.02.2026</a:t>
+              <a:t>13.03.2026</a:t>
             </a:fld>
             <a:endParaRPr lang="ru-RU"/>
           </a:p>
@@ -2933,7 +2938,7 @@
           <a:p>
             <a:fld id="{4F38F130-CAD1-9A4B-87AA-771C4BD74B94}" type="datetimeFigureOut">
               <a:rPr lang="ru-RU" smtClean="0"/>
-              <a:t>27.02.2026</a:t>
+              <a:t>13.03.2026</a:t>
             </a:fld>
             <a:endParaRPr lang="ru-RU"/>
           </a:p>
@@ -3334,7 +3339,7 @@
 </file>
 
 <file path=ppt/slides/slide1.xml><?xml version="1.0" encoding="utf-8"?>
-<p:sld xmlns:a="http://schemas.openxmlformats.org/drawingml/2006/main" xmlns:p="http://schemas.openxmlformats.org/presentationml/2006/main" xmlns:r="http://schemas.openxmlformats.org/officeDocument/2006/relationships">
+<p:sld xmlns:a="http://schemas.openxmlformats.org/drawingml/2006/main" xmlns:r="http://schemas.openxmlformats.org/officeDocument/2006/relationships" xmlns:p="http://schemas.openxmlformats.org/presentationml/2006/main">
   <p:cSld>
     <p:spTree>
       <p:nvGrpSpPr>
@@ -3342,7 +3347,14 @@
         <p:cNvGrpSpPr/>
         <p:nvPr/>
       </p:nvGrpSpPr>
-      <p:grpSpPr/>
+      <p:grpSpPr>
+        <a:xfrm>
+          <a:off x="0" y="0"/>
+          <a:ext cx="0" cy="0"/>
+          <a:chOff x="0" y="0"/>
+          <a:chExt cx="0" cy="0"/>
+        </a:xfrm>
+      </p:grpSpPr>
       <p:sp>
         <p:nvSpPr>
           <p:cNvPr id="2" name="Title 1"/>
@@ -3380,8 +3392,34 @@
           <a:lstStyle/>
           <a:p>
             <a:r>
-              <a:t>Лекция 2 – Нейронные сети</a:t>
-            </a:r>
+              <a:rPr dirty="0" err="1"/>
+              <a:t>Лекция</a:t>
+            </a:r>
+            <a:r>
+              <a:rPr dirty="0"/>
+              <a:t> 2 </a:t>
+            </a:r>
+            <a:r>
+              <a:rPr lang="ru-RU" dirty="0"/>
+              <a:t>-</a:t>
+            </a:r>
+            <a:r>
+              <a:rPr dirty="0"/>
+              <a:t> </a:t>
+            </a:r>
+            <a:r>
+              <a:rPr dirty="0" err="1"/>
+              <a:t>Нейронные</a:t>
+            </a:r>
+            <a:r>
+              <a:rPr dirty="0"/>
+              <a:t> </a:t>
+            </a:r>
+            <a:r>
+              <a:rPr dirty="0" err="1"/>
+              <a:t>сети</a:t>
+            </a:r>
+            <a:endParaRPr dirty="0"/>
           </a:p>
         </p:txBody>
       </p:sp>
@@ -3394,7 +3432,7 @@
 </file>
 
 <file path=ppt/slides/slide10.xml><?xml version="1.0" encoding="utf-8"?>
-<p:sld xmlns:a="http://schemas.openxmlformats.org/drawingml/2006/main" xmlns:p="http://schemas.openxmlformats.org/presentationml/2006/main" xmlns:r="http://schemas.openxmlformats.org/officeDocument/2006/relationships">
+<p:sld xmlns:a="http://schemas.openxmlformats.org/drawingml/2006/main" xmlns:r="http://schemas.openxmlformats.org/officeDocument/2006/relationships" xmlns:p="http://schemas.openxmlformats.org/presentationml/2006/main">
   <p:cSld>
     <p:spTree>
       <p:nvGrpSpPr>
@@ -3402,7 +3440,14 @@
         <p:cNvGrpSpPr/>
         <p:nvPr/>
       </p:nvGrpSpPr>
-      <p:grpSpPr/>
+      <p:grpSpPr>
+        <a:xfrm>
+          <a:off x="0" y="0"/>
+          <a:ext cx="0" cy="0"/>
+          <a:chOff x="0" y="0"/>
+          <a:chExt cx="0" cy="0"/>
+        </a:xfrm>
+      </p:grpSpPr>
       <p:sp>
         <p:nvSpPr>
           <p:cNvPr id="2" name="Title 1"/>
@@ -3443,7 +3488,9 @@
               <a:t>Оптимизатор смотрит на loss и двигает веса</a:t>
             </a:r>
           </a:p>
-          <a:p/>
+          <a:p>
+            <a:endParaRPr/>
+          </a:p>
           <a:p>
             <a:r>
               <a:t>SGD — простой градиентный спуск</a:t>
@@ -3459,7 +3506,9 @@
               <a:t>RMSprop — похож на Adam, проще</a:t>
             </a:r>
           </a:p>
-          <a:p/>
+          <a:p>
+            <a:endParaRPr/>
+          </a:p>
           <a:p>
             <a:r>
               <a:t>Аналогия: спуск с горы в тумане</a:t>
@@ -3481,7 +3530,7 @@
 </file>
 
 <file path=ppt/slides/slide11.xml><?xml version="1.0" encoding="utf-8"?>
-<p:sld xmlns:a="http://schemas.openxmlformats.org/drawingml/2006/main" xmlns:p="http://schemas.openxmlformats.org/presentationml/2006/main" xmlns:r="http://schemas.openxmlformats.org/officeDocument/2006/relationships">
+<p:sld xmlns:a="http://schemas.openxmlformats.org/drawingml/2006/main" xmlns:r="http://schemas.openxmlformats.org/officeDocument/2006/relationships" xmlns:p="http://schemas.openxmlformats.org/presentationml/2006/main">
   <p:cSld>
     <p:spTree>
       <p:nvGrpSpPr>
@@ -3489,7 +3538,14 @@
         <p:cNvGrpSpPr/>
         <p:nvPr/>
       </p:nvGrpSpPr>
-      <p:grpSpPr/>
+      <p:grpSpPr>
+        <a:xfrm>
+          <a:off x="0" y="0"/>
+          <a:ext cx="0" cy="0"/>
+          <a:chOff x="0" y="0"/>
+          <a:chExt cx="0" cy="0"/>
+        </a:xfrm>
+      </p:grpSpPr>
       <p:sp>
         <p:nvSpPr>
           <p:cNvPr id="2" name="Title 1"/>
@@ -3530,7 +3586,9 @@
               <a:t>notebook_1_about_neural.ipynb</a:t>
             </a:r>
           </a:p>
-          <a:p/>
+          <a:p>
+            <a:endParaRPr/>
+          </a:p>
           <a:p>
             <a:r>
               <a:t>Ячейка: «Сравниваем оптимизаторы»</a:t>
@@ -3547,7 +3605,7 @@
 </file>
 
 <file path=ppt/slides/slide12.xml><?xml version="1.0" encoding="utf-8"?>
-<p:sld xmlns:a="http://schemas.openxmlformats.org/drawingml/2006/main" xmlns:p="http://schemas.openxmlformats.org/presentationml/2006/main" xmlns:r="http://schemas.openxmlformats.org/officeDocument/2006/relationships">
+<p:sld xmlns:a="http://schemas.openxmlformats.org/drawingml/2006/main" xmlns:r="http://schemas.openxmlformats.org/officeDocument/2006/relationships" xmlns:p="http://schemas.openxmlformats.org/presentationml/2006/main">
   <p:cSld>
     <p:spTree>
       <p:nvGrpSpPr>
@@ -3555,7 +3613,14 @@
         <p:cNvGrpSpPr/>
         <p:nvPr/>
       </p:nvGrpSpPr>
-      <p:grpSpPr/>
+      <p:grpSpPr>
+        <a:xfrm>
+          <a:off x="0" y="0"/>
+          <a:ext cx="0" cy="0"/>
+          <a:chOff x="0" y="0"/>
+          <a:chExt cx="0" cy="0"/>
+        </a:xfrm>
+      </p:grpSpPr>
       <p:sp>
         <p:nvSpPr>
           <p:cNvPr id="2" name="Title 1"/>
@@ -3596,13 +3661,17 @@
               <a:t>При обучении случайная часть нейронов выключается</a:t>
             </a:r>
           </a:p>
-          <a:p/>
+          <a:p>
+            <a:endParaRPr/>
+          </a:p>
           <a:p>
             <a:r>
               <a:t>Dropout(0.2) → ~20% нейронов отключаются</a:t>
             </a:r>
           </a:p>
-          <a:p/>
+          <a:p>
+            <a:endParaRPr/>
+          </a:p>
           <a:p>
             <a:r>
               <a:t>Сеть не полагается на один путь</a:t>
@@ -3624,7 +3693,7 @@
 </file>
 
 <file path=ppt/slides/slide13.xml><?xml version="1.0" encoding="utf-8"?>
-<p:sld xmlns:a="http://schemas.openxmlformats.org/drawingml/2006/main" xmlns:p="http://schemas.openxmlformats.org/presentationml/2006/main" xmlns:r="http://schemas.openxmlformats.org/officeDocument/2006/relationships">
+<p:sld xmlns:a="http://schemas.openxmlformats.org/drawingml/2006/main" xmlns:r="http://schemas.openxmlformats.org/officeDocument/2006/relationships" xmlns:p="http://schemas.openxmlformats.org/presentationml/2006/main">
   <p:cSld>
     <p:spTree>
       <p:nvGrpSpPr>
@@ -3632,7 +3701,14 @@
         <p:cNvGrpSpPr/>
         <p:nvPr/>
       </p:nvGrpSpPr>
-      <p:grpSpPr/>
+      <p:grpSpPr>
+        <a:xfrm>
+          <a:off x="0" y="0"/>
+          <a:ext cx="0" cy="0"/>
+          <a:chOff x="0" y="0"/>
+          <a:chExt cx="0" cy="0"/>
+        </a:xfrm>
+      </p:grpSpPr>
       <p:sp>
         <p:nvSpPr>
           <p:cNvPr id="2" name="Title 1"/>
@@ -3693,7 +3769,9 @@
               <a:t>  4. Повторяем (эпохи)</a:t>
             </a:r>
           </a:p>
-          <a:p/>
+          <a:p>
+            <a:endParaRPr/>
+          </a:p>
           <a:p>
             <a:r>
               <a:t>predict() — прогноз на обученных весах</a:t>
@@ -3710,7 +3788,7 @@
 </file>
 
 <file path=ppt/slides/slide14.xml><?xml version="1.0" encoding="utf-8"?>
-<p:sld xmlns:a="http://schemas.openxmlformats.org/drawingml/2006/main" xmlns:p="http://schemas.openxmlformats.org/presentationml/2006/main" xmlns:r="http://schemas.openxmlformats.org/officeDocument/2006/relationships">
+<p:sld xmlns:a="http://schemas.openxmlformats.org/drawingml/2006/main" xmlns:r="http://schemas.openxmlformats.org/officeDocument/2006/relationships" xmlns:p="http://schemas.openxmlformats.org/presentationml/2006/main">
   <p:cSld>
     <p:spTree>
       <p:nvGrpSpPr>
@@ -3718,7 +3796,14 @@
         <p:cNvGrpSpPr/>
         <p:nvPr/>
       </p:nvGrpSpPr>
-      <p:grpSpPr/>
+      <p:grpSpPr>
+        <a:xfrm>
+          <a:off x="0" y="0"/>
+          <a:ext cx="0" cy="0"/>
+          <a:chOff x="0" y="0"/>
+          <a:chExt cx="0" cy="0"/>
+        </a:xfrm>
+      </p:grpSpPr>
       <p:sp>
         <p:nvSpPr>
           <p:cNvPr id="2" name="Title 1"/>
@@ -3759,7 +3844,9 @@
               <a:t>notebook_1_about_neural.ipynb</a:t>
             </a:r>
           </a:p>
-          <a:p/>
+          <a:p>
+            <a:endParaRPr/>
+          </a:p>
           <a:p>
             <a:r>
               <a:t>Ячейка: «Небольшой пример binary crossentropy»</a:t>
@@ -3776,7 +3863,7 @@
 </file>
 
 <file path=ppt/slides/slide15.xml><?xml version="1.0" encoding="utf-8"?>
-<p:sld xmlns:a="http://schemas.openxmlformats.org/drawingml/2006/main" xmlns:p="http://schemas.openxmlformats.org/presentationml/2006/main" xmlns:r="http://schemas.openxmlformats.org/officeDocument/2006/relationships">
+<p:sld xmlns:a="http://schemas.openxmlformats.org/drawingml/2006/main" xmlns:r="http://schemas.openxmlformats.org/officeDocument/2006/relationships" xmlns:p="http://schemas.openxmlformats.org/presentationml/2006/main">
   <p:cSld>
     <p:spTree>
       <p:nvGrpSpPr>
@@ -3784,7 +3871,14 @@
         <p:cNvGrpSpPr/>
         <p:nvPr/>
       </p:nvGrpSpPr>
-      <p:grpSpPr/>
+      <p:grpSpPr>
+        <a:xfrm>
+          <a:off x="0" y="0"/>
+          <a:ext cx="0" cy="0"/>
+          <a:chOff x="0" y="0"/>
+          <a:chExt cx="0" cy="0"/>
+        </a:xfrm>
+      </p:grpSpPr>
       <p:sp>
         <p:nvSpPr>
           <p:cNvPr id="2" name="Title 1"/>
@@ -3825,7 +3919,9 @@
               <a:t>Задача: разделить точки двух классов</a:t>
             </a:r>
           </a:p>
-          <a:p/>
+          <a:p>
+            <a:endParaRPr/>
+          </a:p>
           <a:p>
             <a:r>
               <a:t>Вход: 2 числа (координаты)</a:t>
@@ -3857,7 +3953,7 @@
 </file>
 
 <file path=ppt/slides/slide16.xml><?xml version="1.0" encoding="utf-8"?>
-<p:sld xmlns:a="http://schemas.openxmlformats.org/drawingml/2006/main" xmlns:p="http://schemas.openxmlformats.org/presentationml/2006/main" xmlns:r="http://schemas.openxmlformats.org/officeDocument/2006/relationships">
+<p:sld xmlns:a="http://schemas.openxmlformats.org/drawingml/2006/main" xmlns:r="http://schemas.openxmlformats.org/officeDocument/2006/relationships" xmlns:p="http://schemas.openxmlformats.org/presentationml/2006/main">
   <p:cSld>
     <p:spTree>
       <p:nvGrpSpPr>
@@ -3865,7 +3961,14 @@
         <p:cNvGrpSpPr/>
         <p:nvPr/>
       </p:nvGrpSpPr>
-      <p:grpSpPr/>
+      <p:grpSpPr>
+        <a:xfrm>
+          <a:off x="0" y="0"/>
+          <a:ext cx="0" cy="0"/>
+          <a:chOff x="0" y="0"/>
+          <a:chExt cx="0" cy="0"/>
+        </a:xfrm>
+      </p:grpSpPr>
       <p:sp>
         <p:nvSpPr>
           <p:cNvPr id="2" name="Title 1"/>
@@ -3906,7 +4009,9 @@
               <a:t>notebook_1_about_neural.ipynb</a:t>
             </a:r>
           </a:p>
-          <a:p/>
+          <a:p>
+            <a:endParaRPr/>
+          </a:p>
           <a:p>
             <a:r>
               <a:t>Ячейки: генерация данных → обучение</a:t>
@@ -3928,7 +4033,7 @@
 </file>
 
 <file path=ppt/slides/slide17.xml><?xml version="1.0" encoding="utf-8"?>
-<p:sld xmlns:a="http://schemas.openxmlformats.org/drawingml/2006/main" xmlns:p="http://schemas.openxmlformats.org/presentationml/2006/main" xmlns:r="http://schemas.openxmlformats.org/officeDocument/2006/relationships">
+<p:sld xmlns:a="http://schemas.openxmlformats.org/drawingml/2006/main" xmlns:r="http://schemas.openxmlformats.org/officeDocument/2006/relationships" xmlns:p="http://schemas.openxmlformats.org/presentationml/2006/main">
   <p:cSld>
     <p:spTree>
       <p:nvGrpSpPr>
@@ -3936,7 +4041,14 @@
         <p:cNvGrpSpPr/>
         <p:nvPr/>
       </p:nvGrpSpPr>
-      <p:grpSpPr/>
+      <p:grpSpPr>
+        <a:xfrm>
+          <a:off x="0" y="0"/>
+          <a:ext cx="0" cy="0"/>
+          <a:chOff x="0" y="0"/>
+          <a:chExt cx="0" cy="0"/>
+        </a:xfrm>
+      </p:grpSpPr>
       <p:sp>
         <p:nvSpPr>
           <p:cNvPr id="2" name="Title 1"/>
@@ -3977,7 +4089,9 @@
               <a:t>Картинка 8x8 → 10 классов (цифры 0-9)</a:t>
             </a:r>
           </a:p>
-          <a:p/>
+          <a:p>
+            <a:endParaRPr/>
+          </a:p>
           <a:p>
             <a:r>
               <a:t>Что изменилось:</a:t>
@@ -4014,7 +4128,7 @@
 </file>
 
 <file path=ppt/slides/slide18.xml><?xml version="1.0" encoding="utf-8"?>
-<p:sld xmlns:a="http://schemas.openxmlformats.org/drawingml/2006/main" xmlns:p="http://schemas.openxmlformats.org/presentationml/2006/main" xmlns:r="http://schemas.openxmlformats.org/officeDocument/2006/relationships">
+<p:sld xmlns:a="http://schemas.openxmlformats.org/drawingml/2006/main" xmlns:r="http://schemas.openxmlformats.org/officeDocument/2006/relationships" xmlns:p="http://schemas.openxmlformats.org/presentationml/2006/main">
   <p:cSld>
     <p:spTree>
       <p:nvGrpSpPr>
@@ -4022,7 +4136,14 @@
         <p:cNvGrpSpPr/>
         <p:nvPr/>
       </p:nvGrpSpPr>
-      <p:grpSpPr/>
+      <p:grpSpPr>
+        <a:xfrm>
+          <a:off x="0" y="0"/>
+          <a:ext cx="0" cy="0"/>
+          <a:chOff x="0" y="0"/>
+          <a:chExt cx="0" cy="0"/>
+        </a:xfrm>
+      </p:grpSpPr>
       <p:sp>
         <p:nvSpPr>
           <p:cNvPr id="2" name="Title 1"/>
@@ -4063,7 +4184,9 @@
               <a:t>notebook_1_about_neural.ipynb</a:t>
             </a:r>
           </a:p>
-          <a:p/>
+          <a:p>
+            <a:endParaRPr/>
+          </a:p>
           <a:p>
             <a:r>
               <a:t>Ячейки: загрузка digits → обучение</a:t>
@@ -4085,7 +4208,7 @@
 </file>
 
 <file path=ppt/slides/slide19.xml><?xml version="1.0" encoding="utf-8"?>
-<p:sld xmlns:a="http://schemas.openxmlformats.org/drawingml/2006/main" xmlns:p="http://schemas.openxmlformats.org/presentationml/2006/main" xmlns:r="http://schemas.openxmlformats.org/officeDocument/2006/relationships">
+<p:sld xmlns:a="http://schemas.openxmlformats.org/drawingml/2006/main" xmlns:r="http://schemas.openxmlformats.org/officeDocument/2006/relationships" xmlns:p="http://schemas.openxmlformats.org/presentationml/2006/main">
   <p:cSld>
     <p:spTree>
       <p:nvGrpSpPr>
@@ -4093,7 +4216,14 @@
         <p:cNvGrpSpPr/>
         <p:nvPr/>
       </p:nvGrpSpPr>
-      <p:grpSpPr/>
+      <p:grpSpPr>
+        <a:xfrm>
+          <a:off x="0" y="0"/>
+          <a:ext cx="0" cy="0"/>
+          <a:chOff x="0" y="0"/>
+          <a:chExt cx="0" cy="0"/>
+        </a:xfrm>
+      </p:grpSpPr>
       <p:sp>
         <p:nvSpPr>
           <p:cNvPr id="2" name="Title 1"/>
@@ -4159,7 +4289,9 @@
               <a:t>fit() — обучение | predict() — прогноз</a:t>
             </a:r>
           </a:p>
-          <a:p/>
+          <a:p>
+            <a:endParaRPr/>
+          </a:p>
           <a:p>
             <a:r>
               <a:t>Одна цепочка: луны → цифры → текст</a:t>
@@ -4176,7 +4308,7 @@
 </file>
 
 <file path=ppt/slides/slide2.xml><?xml version="1.0" encoding="utf-8"?>
-<p:sld xmlns:a="http://schemas.openxmlformats.org/drawingml/2006/main" xmlns:p="http://schemas.openxmlformats.org/presentationml/2006/main" xmlns:r="http://schemas.openxmlformats.org/officeDocument/2006/relationships">
+<p:sld xmlns:a="http://schemas.openxmlformats.org/drawingml/2006/main" xmlns:r="http://schemas.openxmlformats.org/officeDocument/2006/relationships" xmlns:p="http://schemas.openxmlformats.org/presentationml/2006/main">
   <p:cSld>
     <p:spTree>
       <p:nvGrpSpPr>
@@ -4184,7 +4316,14 @@
         <p:cNvGrpSpPr/>
         <p:nvPr/>
       </p:nvGrpSpPr>
-      <p:grpSpPr/>
+      <p:grpSpPr>
+        <a:xfrm>
+          <a:off x="0" y="0"/>
+          <a:ext cx="0" cy="0"/>
+          <a:chOff x="0" y="0"/>
+          <a:chExt cx="0" cy="0"/>
+        </a:xfrm>
+      </p:grpSpPr>
       <p:sp>
         <p:nvSpPr>
           <p:cNvPr id="2" name="Title 1"/>
@@ -4271,7 +4410,7 @@
 </file>
 
 <file path=ppt/slides/slide20.xml><?xml version="1.0" encoding="utf-8"?>
-<p:sld xmlns:a="http://schemas.openxmlformats.org/drawingml/2006/main" xmlns:p="http://schemas.openxmlformats.org/presentationml/2006/main" xmlns:r="http://schemas.openxmlformats.org/officeDocument/2006/relationships">
+<p:sld xmlns:a="http://schemas.openxmlformats.org/drawingml/2006/main" xmlns:r="http://schemas.openxmlformats.org/officeDocument/2006/relationships" xmlns:p="http://schemas.openxmlformats.org/presentationml/2006/main">
   <p:cSld>
     <p:spTree>
       <p:nvGrpSpPr>
@@ -4279,7 +4418,14 @@
         <p:cNvGrpSpPr/>
         <p:nvPr/>
       </p:nvGrpSpPr>
-      <p:grpSpPr/>
+      <p:grpSpPr>
+        <a:xfrm>
+          <a:off x="0" y="0"/>
+          <a:ext cx="0" cy="0"/>
+          <a:chOff x="0" y="0"/>
+          <a:chExt cx="0" cy="0"/>
+        </a:xfrm>
+      </p:grpSpPr>
       <p:sp>
         <p:nvSpPr>
           <p:cNvPr id="2" name="Title 1"/>
@@ -4325,13 +4471,17 @@
               <a:t>Нейросеть не умеет работать со строками</a:t>
             </a:r>
           </a:p>
-          <a:p/>
+          <a:p>
+            <a:endParaRPr/>
+          </a:p>
           <a:p>
             <a:r>
               <a:t>Текст → числа → слои → ответ</a:t>
             </a:r>
           </a:p>
-          <a:p/>
+          <a:p>
+            <a:endParaRPr/>
+          </a:p>
           <a:p>
             <a:r>
               <a:t>Все остальное — те же кирпичики</a:t>
@@ -4348,7 +4498,7 @@
 </file>
 
 <file path=ppt/slides/slide21.xml><?xml version="1.0" encoding="utf-8"?>
-<p:sld xmlns:a="http://schemas.openxmlformats.org/drawingml/2006/main" xmlns:p="http://schemas.openxmlformats.org/presentationml/2006/main" xmlns:r="http://schemas.openxmlformats.org/officeDocument/2006/relationships">
+<p:sld xmlns:a="http://schemas.openxmlformats.org/drawingml/2006/main" xmlns:r="http://schemas.openxmlformats.org/officeDocument/2006/relationships" xmlns:p="http://schemas.openxmlformats.org/presentationml/2006/main">
   <p:cSld>
     <p:spTree>
       <p:nvGrpSpPr>
@@ -4356,7 +4506,14 @@
         <p:cNvGrpSpPr/>
         <p:nvPr/>
       </p:nvGrpSpPr>
-      <p:grpSpPr/>
+      <p:grpSpPr>
+        <a:xfrm>
+          <a:off x="0" y="0"/>
+          <a:ext cx="0" cy="0"/>
+          <a:chOff x="0" y="0"/>
+          <a:chExt cx="0" cy="0"/>
+        </a:xfrm>
+      </p:grpSpPr>
       <p:sp>
         <p:nvSpPr>
           <p:cNvPr id="2" name="Title 1"/>
@@ -4397,7 +4554,9 @@
               <a:t>notebook_2_text_tonal.ipynb</a:t>
             </a:r>
           </a:p>
-          <a:p/>
+          <a:p>
+            <a:endParaRPr/>
+          </a:p>
           <a:p>
             <a:r>
               <a:t>Ячейка: «Загружаем тексты из train_data.txt»</a:t>
@@ -4419,7 +4578,7 @@
 </file>
 
 <file path=ppt/slides/slide22.xml><?xml version="1.0" encoding="utf-8"?>
-<p:sld xmlns:a="http://schemas.openxmlformats.org/drawingml/2006/main" xmlns:p="http://schemas.openxmlformats.org/presentationml/2006/main" xmlns:r="http://schemas.openxmlformats.org/officeDocument/2006/relationships">
+<p:sld xmlns:a="http://schemas.openxmlformats.org/drawingml/2006/main" xmlns:r="http://schemas.openxmlformats.org/officeDocument/2006/relationships" xmlns:p="http://schemas.openxmlformats.org/presentationml/2006/main">
   <p:cSld>
     <p:spTree>
       <p:nvGrpSpPr>
@@ -4427,7 +4586,14 @@
         <p:cNvGrpSpPr/>
         <p:nvPr/>
       </p:nvGrpSpPr>
-      <p:grpSpPr/>
+      <p:grpSpPr>
+        <a:xfrm>
+          <a:off x="0" y="0"/>
+          <a:ext cx="0" cy="0"/>
+          <a:chOff x="0" y="0"/>
+          <a:chExt cx="0" cy="0"/>
+        </a:xfrm>
+      </p:grpSpPr>
       <p:sp>
         <p:nvSpPr>
           <p:cNvPr id="2" name="Title 1"/>
@@ -4473,7 +4639,9 @@
               <a:t>Мы вызываем predict — веса уже внутри</a:t>
             </a:r>
           </a:p>
-          <a:p/>
+          <a:p>
+            <a:endParaRPr/>
+          </a:p>
           <a:p>
             <a:r>
               <a:t>Быстрый результат без сбора данных и fit()</a:t>
@@ -4490,7 +4658,7 @@
 </file>
 
 <file path=ppt/slides/slide23.xml><?xml version="1.0" encoding="utf-8"?>
-<p:sld xmlns:a="http://schemas.openxmlformats.org/drawingml/2006/main" xmlns:p="http://schemas.openxmlformats.org/presentationml/2006/main" xmlns:r="http://schemas.openxmlformats.org/officeDocument/2006/relationships">
+<p:sld xmlns:a="http://schemas.openxmlformats.org/drawingml/2006/main" xmlns:r="http://schemas.openxmlformats.org/officeDocument/2006/relationships" xmlns:p="http://schemas.openxmlformats.org/presentationml/2006/main">
   <p:cSld>
     <p:spTree>
       <p:nvGrpSpPr>
@@ -4498,7 +4666,14 @@
         <p:cNvGrpSpPr/>
         <p:nvPr/>
       </p:nvGrpSpPr>
-      <p:grpSpPr/>
+      <p:grpSpPr>
+        <a:xfrm>
+          <a:off x="0" y="0"/>
+          <a:ext cx="0" cy="0"/>
+          <a:chOff x="0" y="0"/>
+          <a:chExt cx="0" cy="0"/>
+        </a:xfrm>
+      </p:grpSpPr>
       <p:sp>
         <p:nvSpPr>
           <p:cNvPr id="2" name="Title 1"/>
@@ -4539,7 +4714,9 @@
               <a:t>notebook_2_text_tonal.ipynb</a:t>
             </a:r>
           </a:p>
-          <a:p/>
+          <a:p>
+            <a:endParaRPr/>
+          </a:p>
           <a:p>
             <a:r>
               <a:t>Ячейка: «Готовая модель для оценки тональности»</a:t>
@@ -4556,7 +4733,7 @@
 </file>
 
 <file path=ppt/slides/slide24.xml><?xml version="1.0" encoding="utf-8"?>
-<p:sld xmlns:a="http://schemas.openxmlformats.org/drawingml/2006/main" xmlns:p="http://schemas.openxmlformats.org/presentationml/2006/main" xmlns:r="http://schemas.openxmlformats.org/officeDocument/2006/relationships">
+<p:sld xmlns:a="http://schemas.openxmlformats.org/drawingml/2006/main" xmlns:r="http://schemas.openxmlformats.org/officeDocument/2006/relationships" xmlns:p="http://schemas.openxmlformats.org/presentationml/2006/main">
   <p:cSld>
     <p:spTree>
       <p:nvGrpSpPr>
@@ -4564,7 +4741,14 @@
         <p:cNvGrpSpPr/>
         <p:nvPr/>
       </p:nvGrpSpPr>
-      <p:grpSpPr/>
+      <p:grpSpPr>
+        <a:xfrm>
+          <a:off x="0" y="0"/>
+          <a:ext cx="0" cy="0"/>
+          <a:chOff x="0" y="0"/>
+          <a:chExt cx="0" cy="0"/>
+        </a:xfrm>
+      </p:grpSpPr>
       <p:sp>
         <p:nvSpPr>
           <p:cNvPr id="2" name="Title 1"/>
@@ -4610,7 +4794,9 @@
               <a:t>Поиск ближайших → «какие тексты похожи?»</a:t>
             </a:r>
           </a:p>
-          <a:p/>
+          <a:p>
+            <a:endParaRPr/>
+          </a:p>
           <a:p>
             <a:r>
               <a:t>1. Текст → вектор (эмбеддинг)</a:t>
@@ -4637,7 +4823,7 @@
 </file>
 
 <file path=ppt/slides/slide25.xml><?xml version="1.0" encoding="utf-8"?>
-<p:sld xmlns:a="http://schemas.openxmlformats.org/drawingml/2006/main" xmlns:p="http://schemas.openxmlformats.org/presentationml/2006/main" xmlns:r="http://schemas.openxmlformats.org/officeDocument/2006/relationships">
+<p:sld xmlns:a="http://schemas.openxmlformats.org/drawingml/2006/main" xmlns:r="http://schemas.openxmlformats.org/officeDocument/2006/relationships" xmlns:p="http://schemas.openxmlformats.org/presentationml/2006/main">
   <p:cSld>
     <p:spTree>
       <p:nvGrpSpPr>
@@ -4645,7 +4831,14 @@
         <p:cNvGrpSpPr/>
         <p:nvPr/>
       </p:nvGrpSpPr>
-      <p:grpSpPr/>
+      <p:grpSpPr>
+        <a:xfrm>
+          <a:off x="0" y="0"/>
+          <a:ext cx="0" cy="0"/>
+          <a:chOff x="0" y="0"/>
+          <a:chExt cx="0" cy="0"/>
+        </a:xfrm>
+      </p:grpSpPr>
       <p:sp>
         <p:nvSpPr>
           <p:cNvPr id="2" name="Title 1"/>
@@ -4686,7 +4879,9 @@
               <a:t>notebook_2_text_tonal.ipynb</a:t>
             </a:r>
           </a:p>
-          <a:p/>
+          <a:p>
+            <a:endParaRPr/>
+          </a:p>
           <a:p>
             <a:r>
               <a:t>Ячейка: «Ищем ближайшие тексты»</a:t>
@@ -4703,7 +4898,7 @@
 </file>
 
 <file path=ppt/slides/slide26.xml><?xml version="1.0" encoding="utf-8"?>
-<p:sld xmlns:a="http://schemas.openxmlformats.org/drawingml/2006/main" xmlns:p="http://schemas.openxmlformats.org/presentationml/2006/main" xmlns:r="http://schemas.openxmlformats.org/officeDocument/2006/relationships">
+<p:sld xmlns:a="http://schemas.openxmlformats.org/drawingml/2006/main" xmlns:r="http://schemas.openxmlformats.org/officeDocument/2006/relationships" xmlns:p="http://schemas.openxmlformats.org/presentationml/2006/main">
   <p:cSld>
     <p:spTree>
       <p:nvGrpSpPr>
@@ -4711,7 +4906,14 @@
         <p:cNvGrpSpPr/>
         <p:nvPr/>
       </p:nvGrpSpPr>
-      <p:grpSpPr/>
+      <p:grpSpPr>
+        <a:xfrm>
+          <a:off x="0" y="0"/>
+          <a:ext cx="0" cy="0"/>
+          <a:chOff x="0" y="0"/>
+          <a:chExt cx="0" cy="0"/>
+        </a:xfrm>
+      </p:grpSpPr>
       <p:sp>
         <p:nvSpPr>
           <p:cNvPr id="2" name="Title 1"/>
@@ -4757,7 +4959,9 @@
               <a:t>Размечен заранее</a:t>
             </a:r>
           </a:p>
-          <a:p/>
+          <a:p>
+            <a:endParaRPr/>
+          </a:p>
           <a:p>
             <a:r>
               <a:t>Новые блоки:</a:t>
@@ -4773,7 +4977,9 @@
               <a:t>GlobalAveragePooling1D — усредняет слова</a:t>
             </a:r>
           </a:p>
-          <a:p/>
+          <a:p>
+            <a:endParaRPr/>
+          </a:p>
           <a:p>
             <a:r>
               <a:t>Дальше: Dense, Dropout, sigmoid, fit(), predict()</a:t>
@@ -4790,7 +4996,7 @@
 </file>
 
 <file path=ppt/slides/slide27.xml><?xml version="1.0" encoding="utf-8"?>
-<p:sld xmlns:a="http://schemas.openxmlformats.org/drawingml/2006/main" xmlns:p="http://schemas.openxmlformats.org/presentationml/2006/main" xmlns:r="http://schemas.openxmlformats.org/officeDocument/2006/relationships">
+<p:sld xmlns:a="http://schemas.openxmlformats.org/drawingml/2006/main" xmlns:r="http://schemas.openxmlformats.org/officeDocument/2006/relationships" xmlns:p="http://schemas.openxmlformats.org/presentationml/2006/main">
   <p:cSld>
     <p:spTree>
       <p:nvGrpSpPr>
@@ -4798,7 +5004,14 @@
         <p:cNvGrpSpPr/>
         <p:nvPr/>
       </p:nvGrpSpPr>
-      <p:grpSpPr/>
+      <p:grpSpPr>
+        <a:xfrm>
+          <a:off x="0" y="0"/>
+          <a:ext cx="0" cy="0"/>
+          <a:chOff x="0" y="0"/>
+          <a:chExt cx="0" cy="0"/>
+        </a:xfrm>
+      </p:grpSpPr>
       <p:sp>
         <p:nvSpPr>
           <p:cNvPr id="2" name="Title 1"/>
@@ -4839,7 +5052,9 @@
               <a:t>notebook_2_text_tonal.ipynb</a:t>
             </a:r>
           </a:p>
-          <a:p/>
+          <a:p>
+            <a:endParaRPr/>
+          </a:p>
           <a:p>
             <a:r>
               <a:t>Текст → Токены → Embedding → Pooling → Dense → Sigmoid</a:t>
@@ -4856,7 +5071,7 @@
 </file>
 
 <file path=ppt/slides/slide28.xml><?xml version="1.0" encoding="utf-8"?>
-<p:sld xmlns:a="http://schemas.openxmlformats.org/drawingml/2006/main" xmlns:p="http://schemas.openxmlformats.org/presentationml/2006/main" xmlns:r="http://schemas.openxmlformats.org/officeDocument/2006/relationships">
+<p:sld xmlns:a="http://schemas.openxmlformats.org/drawingml/2006/main" xmlns:r="http://schemas.openxmlformats.org/officeDocument/2006/relationships" xmlns:p="http://schemas.openxmlformats.org/presentationml/2006/main">
   <p:cSld>
     <p:spTree>
       <p:nvGrpSpPr>
@@ -4864,7 +5079,14 @@
         <p:cNvGrpSpPr/>
         <p:nvPr/>
       </p:nvGrpSpPr>
-      <p:grpSpPr/>
+      <p:grpSpPr>
+        <a:xfrm>
+          <a:off x="0" y="0"/>
+          <a:ext cx="0" cy="0"/>
+          <a:chOff x="0" y="0"/>
+          <a:chExt cx="0" cy="0"/>
+        </a:xfrm>
+      </p:grpSpPr>
       <p:sp>
         <p:nvSpPr>
           <p:cNvPr id="2" name="Title 1"/>
@@ -4905,7 +5127,9 @@
               <a:t>notebook_2_text_tonal.ipynb</a:t>
             </a:r>
           </a:p>
-          <a:p/>
+          <a:p>
+            <a:endParaRPr/>
+          </a:p>
           <a:p>
             <a:r>
               <a:t>Ячейки: создание модели → обучение</a:t>
@@ -4927,7 +5151,7 @@
 </file>
 
 <file path=ppt/slides/slide29.xml><?xml version="1.0" encoding="utf-8"?>
-<p:sld xmlns:a="http://schemas.openxmlformats.org/drawingml/2006/main" xmlns:p="http://schemas.openxmlformats.org/presentationml/2006/main" xmlns:r="http://schemas.openxmlformats.org/officeDocument/2006/relationships">
+<p:sld xmlns:a="http://schemas.openxmlformats.org/drawingml/2006/main" xmlns:r="http://schemas.openxmlformats.org/officeDocument/2006/relationships" xmlns:p="http://schemas.openxmlformats.org/presentationml/2006/main">
   <p:cSld>
     <p:spTree>
       <p:nvGrpSpPr>
@@ -4935,7 +5159,14 @@
         <p:cNvGrpSpPr/>
         <p:nvPr/>
       </p:nvGrpSpPr>
-      <p:grpSpPr/>
+      <p:grpSpPr>
+        <a:xfrm>
+          <a:off x="0" y="0"/>
+          <a:ext cx="0" cy="0"/>
+          <a:chOff x="0" y="0"/>
+          <a:chExt cx="0" cy="0"/>
+        </a:xfrm>
+      </p:grpSpPr>
       <p:sp>
         <p:nvSpPr>
           <p:cNvPr id="2" name="Title 1"/>
@@ -4973,30 +5204,174 @@
           <a:lstStyle/>
           <a:p>
             <a:r>
-              <a:t>Нейросеть = конструктор из простых деталей</a:t>
-            </a:r>
-          </a:p>
-          <a:p>
-            <a:r>
-              <a:t>Dense, активации, loss, оптимизатор, Dropout</a:t>
-            </a:r>
-          </a:p>
-          <a:p/>
-          <a:p>
-            <a:r>
-              <a:t>Для текста: слова → числа (Embedding + Pooling)</a:t>
-            </a:r>
-          </a:p>
-          <a:p/>
-          <a:p>
-            <a:r>
-              <a:t>Готовые модели = быстрый результат</a:t>
-            </a:r>
-          </a:p>
-          <a:p>
-            <a:r>
-              <a:t>Своя модель = контроль и понимание</a:t>
-            </a:r>
+              <a:rPr dirty="0" err="1"/>
+              <a:t>Нейросеть</a:t>
+            </a:r>
+            <a:r>
+              <a:rPr dirty="0"/>
+              <a:t> = </a:t>
+            </a:r>
+            <a:r>
+              <a:rPr dirty="0" err="1"/>
+              <a:t>конструктор</a:t>
+            </a:r>
+            <a:r>
+              <a:rPr dirty="0"/>
+              <a:t> </a:t>
+            </a:r>
+            <a:r>
+              <a:rPr dirty="0" err="1"/>
+              <a:t>из</a:t>
+            </a:r>
+            <a:r>
+              <a:rPr dirty="0"/>
+              <a:t> </a:t>
+            </a:r>
+            <a:r>
+              <a:rPr dirty="0" err="1"/>
+              <a:t>простых</a:t>
+            </a:r>
+            <a:r>
+              <a:rPr dirty="0"/>
+              <a:t> </a:t>
+            </a:r>
+            <a:r>
+              <a:rPr dirty="0" err="1"/>
+              <a:t>деталей</a:t>
+            </a:r>
+            <a:endParaRPr dirty="0"/>
+          </a:p>
+          <a:p>
+            <a:r>
+              <a:rPr dirty="0"/>
+              <a:t>Dense, </a:t>
+            </a:r>
+            <a:r>
+              <a:rPr dirty="0" err="1"/>
+              <a:t>активации</a:t>
+            </a:r>
+            <a:r>
+              <a:rPr dirty="0"/>
+              <a:t>, loss, </a:t>
+            </a:r>
+            <a:r>
+              <a:rPr dirty="0" err="1"/>
+              <a:t>оптимизатор</a:t>
+            </a:r>
+            <a:r>
+              <a:rPr dirty="0"/>
+              <a:t>, Dropout</a:t>
+            </a:r>
+          </a:p>
+          <a:p>
+            <a:endParaRPr dirty="0"/>
+          </a:p>
+          <a:p>
+            <a:r>
+              <a:rPr dirty="0" err="1"/>
+              <a:t>Для</a:t>
+            </a:r>
+            <a:r>
+              <a:rPr dirty="0"/>
+              <a:t> </a:t>
+            </a:r>
+            <a:r>
+              <a:rPr dirty="0" err="1"/>
+              <a:t>текста</a:t>
+            </a:r>
+            <a:r>
+              <a:rPr dirty="0"/>
+              <a:t>: </a:t>
+            </a:r>
+            <a:r>
+              <a:rPr dirty="0" err="1"/>
+              <a:t>слова</a:t>
+            </a:r>
+            <a:r>
+              <a:rPr dirty="0"/>
+              <a:t> → </a:t>
+            </a:r>
+            <a:r>
+              <a:rPr dirty="0" err="1"/>
+              <a:t>числа</a:t>
+            </a:r>
+            <a:r>
+              <a:rPr dirty="0"/>
+              <a:t> (Embedding + Pooling)</a:t>
+            </a:r>
+          </a:p>
+          <a:p>
+            <a:endParaRPr dirty="0"/>
+          </a:p>
+          <a:p>
+            <a:r>
+              <a:rPr dirty="0" err="1"/>
+              <a:t>Готовые</a:t>
+            </a:r>
+            <a:r>
+              <a:rPr dirty="0"/>
+              <a:t> </a:t>
+            </a:r>
+            <a:r>
+              <a:rPr dirty="0" err="1"/>
+              <a:t>модели</a:t>
+            </a:r>
+            <a:r>
+              <a:rPr dirty="0"/>
+              <a:t> = </a:t>
+            </a:r>
+            <a:r>
+              <a:rPr dirty="0" err="1"/>
+              <a:t>быстрый</a:t>
+            </a:r>
+            <a:r>
+              <a:rPr dirty="0"/>
+              <a:t> </a:t>
+            </a:r>
+            <a:r>
+              <a:rPr dirty="0" err="1"/>
+              <a:t>результат</a:t>
+            </a:r>
+            <a:endParaRPr dirty="0"/>
+          </a:p>
+          <a:p>
+            <a:r>
+              <a:rPr dirty="0" err="1"/>
+              <a:t>Своя</a:t>
+            </a:r>
+            <a:r>
+              <a:rPr dirty="0"/>
+              <a:t> </a:t>
+            </a:r>
+            <a:r>
+              <a:rPr dirty="0" err="1"/>
+              <a:t>модель</a:t>
+            </a:r>
+            <a:r>
+              <a:rPr dirty="0"/>
+              <a:t> = </a:t>
+            </a:r>
+            <a:r>
+              <a:rPr dirty="0" err="1"/>
+              <a:t>контроль</a:t>
+            </a:r>
+            <a:r>
+              <a:rPr dirty="0"/>
+              <a:t> </a:t>
+            </a:r>
+            <a:r>
+              <a:rPr dirty="0" err="1"/>
+              <a:t>и</a:t>
+            </a:r>
+            <a:r>
+              <a:rPr dirty="0"/>
+              <a:t> </a:t>
+            </a:r>
+            <a:r>
+              <a:rPr dirty="0" err="1"/>
+              <a:t>понимание</a:t>
+            </a:r>
+            <a:endParaRPr dirty="0"/>
           </a:p>
         </p:txBody>
       </p:sp>
@@ -5009,7 +5384,7 @@
 </file>
 
 <file path=ppt/slides/slide3.xml><?xml version="1.0" encoding="utf-8"?>
-<p:sld xmlns:a="http://schemas.openxmlformats.org/drawingml/2006/main" xmlns:p="http://schemas.openxmlformats.org/presentationml/2006/main" xmlns:r="http://schemas.openxmlformats.org/officeDocument/2006/relationships">
+<p:sld xmlns:a="http://schemas.openxmlformats.org/drawingml/2006/main" xmlns:r="http://schemas.openxmlformats.org/officeDocument/2006/relationships" xmlns:p="http://schemas.openxmlformats.org/presentationml/2006/main">
   <p:cSld>
     <p:spTree>
       <p:nvGrpSpPr>
@@ -5017,7 +5392,14 @@
         <p:cNvGrpSpPr/>
         <p:nvPr/>
       </p:nvGrpSpPr>
-      <p:grpSpPr/>
+      <p:grpSpPr>
+        <a:xfrm>
+          <a:off x="0" y="0"/>
+          <a:ext cx="0" cy="0"/>
+          <a:chOff x="0" y="0"/>
+          <a:chExt cx="0" cy="0"/>
+        </a:xfrm>
+      </p:grpSpPr>
       <p:sp>
         <p:nvSpPr>
           <p:cNvPr id="2" name="Title 1"/>
@@ -5063,7 +5445,9 @@
               <a:t>прогоняет через слои вычислений и выдает ответ</a:t>
             </a:r>
           </a:p>
-          <a:p/>
+          <a:p>
+            <a:endParaRPr/>
+          </a:p>
           <a:p>
             <a:r>
               <a:t>Самая маленькая деталь — нейрон:</a:t>
@@ -5090,7 +5474,7 @@
 </file>
 
 <file path=ppt/slides/slide30.xml><?xml version="1.0" encoding="utf-8"?>
-<p:sld xmlns:a="http://schemas.openxmlformats.org/drawingml/2006/main" xmlns:p="http://schemas.openxmlformats.org/presentationml/2006/main" xmlns:r="http://schemas.openxmlformats.org/officeDocument/2006/relationships">
+<p:sld xmlns:a="http://schemas.openxmlformats.org/drawingml/2006/main" xmlns:r="http://schemas.openxmlformats.org/officeDocument/2006/relationships" xmlns:p="http://schemas.openxmlformats.org/presentationml/2006/main">
   <p:cSld>
     <p:spTree>
       <p:nvGrpSpPr>
@@ -5098,7 +5482,14 @@
         <p:cNvGrpSpPr/>
         <p:nvPr/>
       </p:nvGrpSpPr>
-      <p:grpSpPr/>
+      <p:grpSpPr>
+        <a:xfrm>
+          <a:off x="0" y="0"/>
+          <a:ext cx="0" cy="0"/>
+          <a:chOff x="0" y="0"/>
+          <a:chExt cx="0" cy="0"/>
+        </a:xfrm>
+      </p:grpSpPr>
       <p:sp>
         <p:nvSpPr>
           <p:cNvPr id="2" name="Title 1"/>
@@ -5115,8 +5506,10 @@
           <a:lstStyle/>
           <a:p>
             <a:r>
+              <a:rPr dirty="0" err="1"/>
               <a:t>Спасибо</a:t>
             </a:r>
+            <a:endParaRPr dirty="0"/>
           </a:p>
         </p:txBody>
       </p:sp>
@@ -5134,7 +5527,9 @@
         <p:txBody>
           <a:bodyPr/>
           <a:lstStyle/>
-          <a:p/>
+          <a:p>
+            <a:endParaRPr/>
+          </a:p>
         </p:txBody>
       </p:sp>
     </p:spTree>
@@ -5146,7 +5541,7 @@
 </file>
 
 <file path=ppt/slides/slide4.xml><?xml version="1.0" encoding="utf-8"?>
-<p:sld xmlns:a="http://schemas.openxmlformats.org/drawingml/2006/main" xmlns:p="http://schemas.openxmlformats.org/presentationml/2006/main" xmlns:r="http://schemas.openxmlformats.org/officeDocument/2006/relationships">
+<p:sld xmlns:a="http://schemas.openxmlformats.org/drawingml/2006/main" xmlns:r="http://schemas.openxmlformats.org/officeDocument/2006/relationships" xmlns:p="http://schemas.openxmlformats.org/presentationml/2006/main">
   <p:cSld>
     <p:spTree>
       <p:nvGrpSpPr>
@@ -5154,7 +5549,14 @@
         <p:cNvGrpSpPr/>
         <p:nvPr/>
       </p:nvGrpSpPr>
-      <p:grpSpPr/>
+      <p:grpSpPr>
+        <a:xfrm>
+          <a:off x="0" y="0"/>
+          <a:ext cx="0" cy="0"/>
+          <a:chOff x="0" y="0"/>
+          <a:chExt cx="0" cy="0"/>
+        </a:xfrm>
+      </p:grpSpPr>
       <p:sp>
         <p:nvSpPr>
           <p:cNvPr id="2" name="Title 1"/>
@@ -5171,8 +5573,10 @@
           <a:lstStyle/>
           <a:p>
             <a:r>
-              <a:t>Словарик</a:t>
-            </a:r>
+              <a:rPr lang="ru-RU" dirty="0"/>
+              <a:t>Словарь терминов</a:t>
+            </a:r>
+            <a:endParaRPr dirty="0"/>
           </a:p>
         </p:txBody>
       </p:sp>
@@ -5192,38 +5596,176 @@
           <a:lstStyle/>
           <a:p>
             <a:r>
-              <a:t>Вход (feature) — число на входе модели</a:t>
-            </a:r>
-          </a:p>
-          <a:p>
-            <a:r>
-              <a:t>Вес (weight) — коэффициент важности</a:t>
-            </a:r>
-          </a:p>
-          <a:p>
-            <a:r>
-              <a:t>Смещение (bias) — сдвиг</a:t>
-            </a:r>
-          </a:p>
-          <a:p>
-            <a:r>
-              <a:t>Активация — нелинейное преобразование</a:t>
-            </a:r>
-          </a:p>
-          <a:p>
-            <a:r>
-              <a:t>Слой (layer) — группа нейронов</a:t>
-            </a:r>
-          </a:p>
-          <a:p>
-            <a:r>
-              <a:t>Loss — число ошибки</a:t>
-            </a:r>
-          </a:p>
-          <a:p>
-            <a:r>
-              <a:t>Оптимизатор — алгоритм, двигающий веса</a:t>
-            </a:r>
+              <a:rPr dirty="0" err="1"/>
+              <a:t>Вход</a:t>
+            </a:r>
+            <a:r>
+              <a:rPr dirty="0"/>
+              <a:t> (feature) — </a:t>
+            </a:r>
+            <a:r>
+              <a:rPr dirty="0" err="1"/>
+              <a:t>число</a:t>
+            </a:r>
+            <a:r>
+              <a:rPr dirty="0"/>
+              <a:t> </a:t>
+            </a:r>
+            <a:r>
+              <a:rPr dirty="0" err="1"/>
+              <a:t>на</a:t>
+            </a:r>
+            <a:r>
+              <a:rPr dirty="0"/>
+              <a:t> </a:t>
+            </a:r>
+            <a:r>
+              <a:rPr dirty="0" err="1"/>
+              <a:t>входе</a:t>
+            </a:r>
+            <a:r>
+              <a:rPr dirty="0"/>
+              <a:t> </a:t>
+            </a:r>
+            <a:r>
+              <a:rPr dirty="0" err="1"/>
+              <a:t>модели</a:t>
+            </a:r>
+            <a:endParaRPr dirty="0"/>
+          </a:p>
+          <a:p>
+            <a:r>
+              <a:rPr dirty="0" err="1"/>
+              <a:t>Вес</a:t>
+            </a:r>
+            <a:r>
+              <a:rPr dirty="0"/>
+              <a:t> (weight) — </a:t>
+            </a:r>
+            <a:r>
+              <a:rPr dirty="0" err="1"/>
+              <a:t>коэффициент</a:t>
+            </a:r>
+            <a:r>
+              <a:rPr dirty="0"/>
+              <a:t> </a:t>
+            </a:r>
+            <a:r>
+              <a:rPr dirty="0" err="1"/>
+              <a:t>важности</a:t>
+            </a:r>
+            <a:endParaRPr dirty="0"/>
+          </a:p>
+          <a:p>
+            <a:r>
+              <a:rPr dirty="0" err="1"/>
+              <a:t>Смещение</a:t>
+            </a:r>
+            <a:r>
+              <a:rPr dirty="0"/>
+              <a:t> (bias) — </a:t>
+            </a:r>
+            <a:r>
+              <a:rPr dirty="0" err="1"/>
+              <a:t>сдвиг</a:t>
+            </a:r>
+            <a:endParaRPr dirty="0"/>
+          </a:p>
+          <a:p>
+            <a:r>
+              <a:rPr dirty="0" err="1"/>
+              <a:t>Активация</a:t>
+            </a:r>
+            <a:r>
+              <a:rPr dirty="0"/>
+              <a:t> — </a:t>
+            </a:r>
+            <a:r>
+              <a:rPr dirty="0" err="1"/>
+              <a:t>нелинейное</a:t>
+            </a:r>
+            <a:r>
+              <a:rPr dirty="0"/>
+              <a:t> </a:t>
+            </a:r>
+            <a:r>
+              <a:rPr dirty="0" err="1"/>
+              <a:t>преобразование</a:t>
+            </a:r>
+            <a:endParaRPr dirty="0"/>
+          </a:p>
+          <a:p>
+            <a:r>
+              <a:rPr dirty="0" err="1"/>
+              <a:t>Слой</a:t>
+            </a:r>
+            <a:r>
+              <a:rPr dirty="0"/>
+              <a:t> (layer) — </a:t>
+            </a:r>
+            <a:r>
+              <a:rPr dirty="0" err="1"/>
+              <a:t>группа</a:t>
+            </a:r>
+            <a:r>
+              <a:rPr dirty="0"/>
+              <a:t> </a:t>
+            </a:r>
+            <a:r>
+              <a:rPr dirty="0" err="1"/>
+              <a:t>нейронов</a:t>
+            </a:r>
+            <a:endParaRPr dirty="0"/>
+          </a:p>
+          <a:p>
+            <a:r>
+              <a:rPr dirty="0"/>
+              <a:t>Loss — </a:t>
+            </a:r>
+            <a:r>
+              <a:rPr dirty="0" err="1"/>
+              <a:t>число</a:t>
+            </a:r>
+            <a:r>
+              <a:rPr dirty="0"/>
+              <a:t> </a:t>
+            </a:r>
+            <a:r>
+              <a:rPr dirty="0" err="1"/>
+              <a:t>ошибки</a:t>
+            </a:r>
+            <a:endParaRPr dirty="0"/>
+          </a:p>
+          <a:p>
+            <a:r>
+              <a:rPr dirty="0" err="1"/>
+              <a:t>Оптимизатор</a:t>
+            </a:r>
+            <a:r>
+              <a:rPr dirty="0"/>
+              <a:t> — </a:t>
+            </a:r>
+            <a:r>
+              <a:rPr dirty="0" err="1"/>
+              <a:t>алгоритм</a:t>
+            </a:r>
+            <a:r>
+              <a:rPr dirty="0"/>
+              <a:t>, </a:t>
+            </a:r>
+            <a:r>
+              <a:rPr dirty="0" err="1"/>
+              <a:t>двигающий</a:t>
+            </a:r>
+            <a:r>
+              <a:rPr dirty="0"/>
+              <a:t> </a:t>
+            </a:r>
+            <a:r>
+              <a:rPr dirty="0" err="1"/>
+              <a:t>веса</a:t>
+            </a:r>
+            <a:endParaRPr dirty="0"/>
           </a:p>
         </p:txBody>
       </p:sp>
@@ -5236,7 +5778,7 @@
 </file>
 
 <file path=ppt/slides/slide5.xml><?xml version="1.0" encoding="utf-8"?>
-<p:sld xmlns:a="http://schemas.openxmlformats.org/drawingml/2006/main" xmlns:p="http://schemas.openxmlformats.org/presentationml/2006/main" xmlns:r="http://schemas.openxmlformats.org/officeDocument/2006/relationships">
+<p:sld xmlns:a="http://schemas.openxmlformats.org/drawingml/2006/main" xmlns:r="http://schemas.openxmlformats.org/officeDocument/2006/relationships" xmlns:p="http://schemas.openxmlformats.org/presentationml/2006/main">
   <p:cSld>
     <p:spTree>
       <p:nvGrpSpPr>
@@ -5244,7 +5786,14 @@
         <p:cNvGrpSpPr/>
         <p:nvPr/>
       </p:nvGrpSpPr>
-      <p:grpSpPr/>
+      <p:grpSpPr>
+        <a:xfrm>
+          <a:off x="0" y="0"/>
+          <a:ext cx="0" cy="0"/>
+          <a:chOff x="0" y="0"/>
+          <a:chExt cx="0" cy="0"/>
+        </a:xfrm>
+      </p:grpSpPr>
       <p:sp>
         <p:nvSpPr>
           <p:cNvPr id="2" name="Title 1"/>
@@ -5282,30 +5831,180 @@
           <a:lstStyle/>
           <a:p>
             <a:r>
-              <a:t>Dense — полносвязный слой</a:t>
-            </a:r>
-          </a:p>
-          <a:p>
-            <a:r>
-              <a:t>Каждый вход соединен с каждым нейроном</a:t>
-            </a:r>
-          </a:p>
-          <a:p/>
-          <a:p>
-            <a:r>
-              <a:t>Пример: 2 входа → Dense(4) → 4 нейрона</a:t>
-            </a:r>
-          </a:p>
-          <a:p>
-            <a:r>
-              <a:t>Каждый нейрон получает оба входа</a:t>
-            </a:r>
-          </a:p>
-          <a:p/>
-          <a:p>
-            <a:r>
-              <a:t>Сколько нейронов? Подбирается экспериментально</a:t>
-            </a:r>
+              <a:rPr dirty="0"/>
+              <a:t>Dense </a:t>
+            </a:r>
+            <a:r>
+              <a:rPr lang="ru-RU" dirty="0"/>
+              <a:t>-</a:t>
+            </a:r>
+            <a:r>
+              <a:rPr dirty="0"/>
+              <a:t> </a:t>
+            </a:r>
+            <a:r>
+              <a:rPr dirty="0" err="1"/>
+              <a:t>полносвязный</a:t>
+            </a:r>
+            <a:r>
+              <a:rPr dirty="0"/>
+              <a:t> </a:t>
+            </a:r>
+            <a:r>
+              <a:rPr dirty="0" err="1"/>
+              <a:t>слой</a:t>
+            </a:r>
+            <a:r>
+              <a:rPr lang="ru-RU" dirty="0"/>
+              <a:t> (связи со всем прошлым слоем)</a:t>
+            </a:r>
+            <a:endParaRPr dirty="0"/>
+          </a:p>
+          <a:p>
+            <a:r>
+              <a:rPr dirty="0" err="1"/>
+              <a:t>Каждый</a:t>
+            </a:r>
+            <a:r>
+              <a:rPr dirty="0"/>
+              <a:t> </a:t>
+            </a:r>
+            <a:r>
+              <a:rPr dirty="0" err="1"/>
+              <a:t>вход</a:t>
+            </a:r>
+            <a:r>
+              <a:rPr dirty="0"/>
+              <a:t> </a:t>
+            </a:r>
+            <a:r>
+              <a:rPr dirty="0" err="1"/>
+              <a:t>соединен</a:t>
+            </a:r>
+            <a:r>
+              <a:rPr dirty="0"/>
+              <a:t> </a:t>
+            </a:r>
+            <a:r>
+              <a:rPr dirty="0" err="1"/>
+              <a:t>с</a:t>
+            </a:r>
+            <a:r>
+              <a:rPr dirty="0"/>
+              <a:t> </a:t>
+            </a:r>
+            <a:r>
+              <a:rPr dirty="0" err="1"/>
+              <a:t>каждым</a:t>
+            </a:r>
+            <a:r>
+              <a:rPr dirty="0"/>
+              <a:t> </a:t>
+            </a:r>
+            <a:r>
+              <a:rPr dirty="0" err="1"/>
+              <a:t>нейроном</a:t>
+            </a:r>
+            <a:endParaRPr dirty="0"/>
+          </a:p>
+          <a:p>
+            <a:endParaRPr dirty="0"/>
+          </a:p>
+          <a:p>
+            <a:r>
+              <a:rPr dirty="0" err="1"/>
+              <a:t>Пример</a:t>
+            </a:r>
+            <a:r>
+              <a:rPr dirty="0"/>
+              <a:t>: 2 </a:t>
+            </a:r>
+            <a:r>
+              <a:rPr dirty="0" err="1"/>
+              <a:t>входа</a:t>
+            </a:r>
+            <a:r>
+              <a:rPr dirty="0"/>
+              <a:t> → Dense(4) → 4 </a:t>
+            </a:r>
+            <a:r>
+              <a:rPr dirty="0" err="1"/>
+              <a:t>нейрона</a:t>
+            </a:r>
+            <a:endParaRPr dirty="0"/>
+          </a:p>
+          <a:p>
+            <a:r>
+              <a:rPr dirty="0" err="1"/>
+              <a:t>Каждый</a:t>
+            </a:r>
+            <a:r>
+              <a:rPr dirty="0"/>
+              <a:t> </a:t>
+            </a:r>
+            <a:r>
+              <a:rPr dirty="0" err="1"/>
+              <a:t>нейрон</a:t>
+            </a:r>
+            <a:r>
+              <a:rPr dirty="0"/>
+              <a:t> </a:t>
+            </a:r>
+            <a:r>
+              <a:rPr dirty="0" err="1"/>
+              <a:t>получает</a:t>
+            </a:r>
+            <a:r>
+              <a:rPr dirty="0"/>
+              <a:t> </a:t>
+            </a:r>
+            <a:r>
+              <a:rPr dirty="0" err="1"/>
+              <a:t>оба</a:t>
+            </a:r>
+            <a:r>
+              <a:rPr dirty="0"/>
+              <a:t> </a:t>
+            </a:r>
+            <a:r>
+              <a:rPr dirty="0" err="1"/>
+              <a:t>входа</a:t>
+            </a:r>
+            <a:endParaRPr dirty="0"/>
+          </a:p>
+          <a:p>
+            <a:endParaRPr dirty="0"/>
+          </a:p>
+          <a:p>
+            <a:r>
+              <a:rPr dirty="0" err="1"/>
+              <a:t>Сколько</a:t>
+            </a:r>
+            <a:r>
+              <a:rPr dirty="0"/>
+              <a:t> </a:t>
+            </a:r>
+            <a:r>
+              <a:rPr dirty="0" err="1"/>
+              <a:t>нейронов</a:t>
+            </a:r>
+            <a:r>
+              <a:rPr dirty="0"/>
+              <a:t>? </a:t>
+            </a:r>
+            <a:r>
+              <a:rPr dirty="0" err="1"/>
+              <a:t>Подбирается</a:t>
+            </a:r>
+            <a:r>
+              <a:rPr dirty="0"/>
+              <a:t> </a:t>
+            </a:r>
+            <a:r>
+              <a:rPr dirty="0" err="1"/>
+              <a:t>экспериментально</a:t>
+            </a:r>
+            <a:endParaRPr dirty="0"/>
           </a:p>
         </p:txBody>
       </p:sp>
@@ -5318,7 +6017,7 @@
 </file>
 
 <file path=ppt/slides/slide6.xml><?xml version="1.0" encoding="utf-8"?>
-<p:sld xmlns:a="http://schemas.openxmlformats.org/drawingml/2006/main" xmlns:p="http://schemas.openxmlformats.org/presentationml/2006/main" xmlns:r="http://schemas.openxmlformats.org/officeDocument/2006/relationships">
+<p:sld xmlns:a="http://schemas.openxmlformats.org/drawingml/2006/main" xmlns:r="http://schemas.openxmlformats.org/officeDocument/2006/relationships" xmlns:p="http://schemas.openxmlformats.org/presentationml/2006/main">
   <p:cSld>
     <p:spTree>
       <p:nvGrpSpPr>
@@ -5326,7 +6025,14 @@
         <p:cNvGrpSpPr/>
         <p:nvPr/>
       </p:nvGrpSpPr>
-      <p:grpSpPr/>
+      <p:grpSpPr>
+        <a:xfrm>
+          <a:off x="0" y="0"/>
+          <a:ext cx="0" cy="0"/>
+          <a:chOff x="0" y="0"/>
+          <a:chExt cx="0" cy="0"/>
+        </a:xfrm>
+      </p:grpSpPr>
       <p:sp>
         <p:nvSpPr>
           <p:cNvPr id="2" name="Title 1"/>
@@ -5367,7 +6073,9 @@
               <a:t>notebook_1_about_neural.ipynb</a:t>
             </a:r>
           </a:p>
-          <a:p/>
+          <a:p>
+            <a:endParaRPr/>
+          </a:p>
           <a:p>
             <a:r>
               <a:t>Ячейки: «Один нейрон вручную»</a:t>
@@ -5389,7 +6097,7 @@
 </file>
 
 <file path=ppt/slides/slide7.xml><?xml version="1.0" encoding="utf-8"?>
-<p:sld xmlns:a="http://schemas.openxmlformats.org/drawingml/2006/main" xmlns:p="http://schemas.openxmlformats.org/presentationml/2006/main" xmlns:r="http://schemas.openxmlformats.org/officeDocument/2006/relationships">
+<p:sld xmlns:a="http://schemas.openxmlformats.org/drawingml/2006/main" xmlns:r="http://schemas.openxmlformats.org/officeDocument/2006/relationships" xmlns:p="http://schemas.openxmlformats.org/presentationml/2006/main">
   <p:cSld>
     <p:spTree>
       <p:nvGrpSpPr>
@@ -5397,7 +6105,14 @@
         <p:cNvGrpSpPr/>
         <p:nvPr/>
       </p:nvGrpSpPr>
-      <p:grpSpPr/>
+      <p:grpSpPr>
+        <a:xfrm>
+          <a:off x="0" y="0"/>
+          <a:ext cx="0" cy="0"/>
+          <a:chOff x="0" y="0"/>
+          <a:chExt cx="0" cy="0"/>
+        </a:xfrm>
+      </p:grpSpPr>
       <p:sp>
         <p:nvSpPr>
           <p:cNvPr id="2" name="Title 1"/>
@@ -5453,7 +6168,9 @@
               <a:t>tanh — сжимает в -1..1</a:t>
             </a:r>
           </a:p>
-          <a:p/>
+          <a:p>
+            <a:endParaRPr/>
+          </a:p>
           <a:p>
             <a:r>
               <a:t>Без активации 100 слоев = одна линейная формула</a:t>
@@ -5470,7 +6187,7 @@
 </file>
 
 <file path=ppt/slides/slide8.xml><?xml version="1.0" encoding="utf-8"?>
-<p:sld xmlns:a="http://schemas.openxmlformats.org/drawingml/2006/main" xmlns:p="http://schemas.openxmlformats.org/presentationml/2006/main" xmlns:r="http://schemas.openxmlformats.org/officeDocument/2006/relationships">
+<p:sld xmlns:a="http://schemas.openxmlformats.org/drawingml/2006/main" xmlns:r="http://schemas.openxmlformats.org/officeDocument/2006/relationships" xmlns:p="http://schemas.openxmlformats.org/presentationml/2006/main">
   <p:cSld>
     <p:spTree>
       <p:nvGrpSpPr>
@@ -5478,7 +6195,14 @@
         <p:cNvGrpSpPr/>
         <p:nvPr/>
       </p:nvGrpSpPr>
-      <p:grpSpPr/>
+      <p:grpSpPr>
+        <a:xfrm>
+          <a:off x="0" y="0"/>
+          <a:ext cx="0" cy="0"/>
+          <a:chOff x="0" y="0"/>
+          <a:chExt cx="0" cy="0"/>
+        </a:xfrm>
+      </p:grpSpPr>
       <p:sp>
         <p:nvSpPr>
           <p:cNvPr id="2" name="Title 1"/>
@@ -5519,7 +6243,9 @@
               <a:t>notebook_1_about_neural.ipynb</a:t>
             </a:r>
           </a:p>
-          <a:p/>
+          <a:p>
+            <a:endParaRPr/>
+          </a:p>
           <a:p>
             <a:r>
               <a:t>Ячейка: «Графики функций активации + пример softmax»</a:t>
@@ -5536,7 +6262,7 @@
 </file>
 
 <file path=ppt/slides/slide9.xml><?xml version="1.0" encoding="utf-8"?>
-<p:sld xmlns:a="http://schemas.openxmlformats.org/drawingml/2006/main" xmlns:p="http://schemas.openxmlformats.org/presentationml/2006/main" xmlns:r="http://schemas.openxmlformats.org/officeDocument/2006/relationships">
+<p:sld xmlns:a="http://schemas.openxmlformats.org/drawingml/2006/main" xmlns:r="http://schemas.openxmlformats.org/officeDocument/2006/relationships" xmlns:p="http://schemas.openxmlformats.org/presentationml/2006/main">
   <p:cSld>
     <p:spTree>
       <p:nvGrpSpPr>
@@ -5544,7 +6270,14 @@
         <p:cNvGrpSpPr/>
         <p:nvPr/>
       </p:nvGrpSpPr>
-      <p:grpSpPr/>
+      <p:grpSpPr>
+        <a:xfrm>
+          <a:off x="0" y="0"/>
+          <a:ext cx="0" cy="0"/>
+          <a:chOff x="0" y="0"/>
+          <a:chExt cx="0" cy="0"/>
+        </a:xfrm>
+      </p:grpSpPr>
       <p:sp>
         <p:nvSpPr>
           <p:cNvPr id="2" name="Title 1"/>
@@ -5561,8 +6294,30 @@
           <a:lstStyle/>
           <a:p>
             <a:r>
-              <a:t>Loss — оценка ошибки</a:t>
-            </a:r>
+              <a:rPr dirty="0"/>
+              <a:t>Loss </a:t>
+            </a:r>
+            <a:r>
+              <a:rPr lang="ru-RU" dirty="0"/>
+              <a:t>-</a:t>
+            </a:r>
+            <a:r>
+              <a:rPr dirty="0"/>
+              <a:t> </a:t>
+            </a:r>
+            <a:r>
+              <a:rPr dirty="0" err="1"/>
+              <a:t>оценка</a:t>
+            </a:r>
+            <a:r>
+              <a:rPr dirty="0"/>
+              <a:t> </a:t>
+            </a:r>
+            <a:r>
+              <a:rPr dirty="0" err="1"/>
+              <a:t>ошибки</a:t>
+            </a:r>
+            <a:endParaRPr dirty="0"/>
           </a:p>
         </p:txBody>
       </p:sp>
@@ -5582,30 +6337,152 @@
           <a:lstStyle/>
           <a:p>
             <a:r>
-              <a:t>Loss — одно число: насколько модель ошиблась</a:t>
-            </a:r>
-          </a:p>
-          <a:p/>
-          <a:p>
-            <a:r>
-              <a:t>Ошиблась уверенно → loss большой</a:t>
-            </a:r>
-          </a:p>
-          <a:p>
-            <a:r>
-              <a:t>Угадала уверенно → loss маленький</a:t>
-            </a:r>
-          </a:p>
-          <a:p/>
-          <a:p>
-            <a:r>
-              <a:t>binary_crossentropy — для 2 классов</a:t>
-            </a:r>
-          </a:p>
-          <a:p>
-            <a:r>
-              <a:t>categorical_crossentropy — для нескольких</a:t>
-            </a:r>
+              <a:rPr dirty="0"/>
+              <a:t>Loss </a:t>
+            </a:r>
+            <a:r>
+              <a:rPr lang="ru-RU" dirty="0"/>
+              <a:t>-</a:t>
+            </a:r>
+            <a:r>
+              <a:rPr dirty="0"/>
+              <a:t> </a:t>
+            </a:r>
+            <a:r>
+              <a:rPr dirty="0" err="1"/>
+              <a:t>одно</a:t>
+            </a:r>
+            <a:r>
+              <a:rPr dirty="0"/>
+              <a:t> </a:t>
+            </a:r>
+            <a:r>
+              <a:rPr dirty="0" err="1"/>
+              <a:t>число</a:t>
+            </a:r>
+            <a:r>
+              <a:rPr dirty="0"/>
+              <a:t>: </a:t>
+            </a:r>
+            <a:r>
+              <a:rPr dirty="0" err="1"/>
+              <a:t>насколько</a:t>
+            </a:r>
+            <a:r>
+              <a:rPr dirty="0"/>
+              <a:t> </a:t>
+            </a:r>
+            <a:r>
+              <a:rPr dirty="0" err="1"/>
+              <a:t>модель</a:t>
+            </a:r>
+            <a:r>
+              <a:rPr dirty="0"/>
+              <a:t> </a:t>
+            </a:r>
+            <a:r>
+              <a:rPr dirty="0" err="1"/>
+              <a:t>ошиблась</a:t>
+            </a:r>
+            <a:endParaRPr dirty="0"/>
+          </a:p>
+          <a:p>
+            <a:endParaRPr dirty="0"/>
+          </a:p>
+          <a:p>
+            <a:r>
+              <a:rPr dirty="0" err="1"/>
+              <a:t>Ошиблась</a:t>
+            </a:r>
+            <a:r>
+              <a:rPr dirty="0"/>
+              <a:t> </a:t>
+            </a:r>
+            <a:r>
+              <a:rPr dirty="0" err="1"/>
+              <a:t>уверенно</a:t>
+            </a:r>
+            <a:r>
+              <a:rPr dirty="0"/>
+              <a:t> → loss </a:t>
+            </a:r>
+            <a:r>
+              <a:rPr dirty="0" err="1"/>
+              <a:t>большой</a:t>
+            </a:r>
+            <a:endParaRPr dirty="0"/>
+          </a:p>
+          <a:p>
+            <a:r>
+              <a:rPr dirty="0" err="1"/>
+              <a:t>Угадала</a:t>
+            </a:r>
+            <a:r>
+              <a:rPr dirty="0"/>
+              <a:t> </a:t>
+            </a:r>
+            <a:r>
+              <a:rPr dirty="0" err="1"/>
+              <a:t>уверенно</a:t>
+            </a:r>
+            <a:r>
+              <a:rPr dirty="0"/>
+              <a:t> → loss </a:t>
+            </a:r>
+            <a:r>
+              <a:rPr dirty="0" err="1"/>
+              <a:t>маленький</a:t>
+            </a:r>
+            <a:endParaRPr dirty="0"/>
+          </a:p>
+          <a:p>
+            <a:endParaRPr dirty="0"/>
+          </a:p>
+          <a:p>
+            <a:r>
+              <a:rPr dirty="0" err="1"/>
+              <a:t>binary_crossentropy</a:t>
+            </a:r>
+            <a:r>
+              <a:rPr dirty="0"/>
+              <a:t> — </a:t>
+            </a:r>
+            <a:r>
+              <a:rPr dirty="0" err="1"/>
+              <a:t>для</a:t>
+            </a:r>
+            <a:r>
+              <a:rPr dirty="0"/>
+              <a:t> 2 </a:t>
+            </a:r>
+            <a:r>
+              <a:rPr dirty="0" err="1"/>
+              <a:t>классов</a:t>
+            </a:r>
+            <a:endParaRPr dirty="0"/>
+          </a:p>
+          <a:p>
+            <a:r>
+              <a:rPr dirty="0" err="1"/>
+              <a:t>categorical_crossentropy</a:t>
+            </a:r>
+            <a:r>
+              <a:rPr dirty="0"/>
+              <a:t> — </a:t>
+            </a:r>
+            <a:r>
+              <a:rPr dirty="0" err="1"/>
+              <a:t>для</a:t>
+            </a:r>
+            <a:r>
+              <a:rPr dirty="0"/>
+              <a:t> </a:t>
+            </a:r>
+            <a:r>
+              <a:rPr dirty="0" err="1"/>
+              <a:t>нескольких</a:t>
+            </a:r>
+            <a:endParaRPr dirty="0"/>
           </a:p>
         </p:txBody>
       </p:sp>
